--- a/SafeOps_答辩演示PPT.pptx
+++ b/SafeOps_答辩演示PPT.pptx
@@ -9040,7 +9040,7 @@
               <a:rPr sz="3600" b="1">
                 <a:latin typeface="微软雅黑" panose="020B0503020204020204" pitchFamily="34" charset="-122"/>
               </a:rPr>
-              <a:t>2.2 关键设计：安全护栏与可信审计</a:t>
+              <a:t>3.2 关键设计：安全护栏与可信审计</a:t>
             </a:r>
             <a:endParaRPr sz="3600" b="1">
               <a:latin typeface="微软雅黑" panose="020B0503020204020204" pitchFamily="34" charset="-122"/>
@@ -9080,7 +9080,7 @@
                 <a:ea typeface="方正小标宋简体" panose="03000509000000000000" charset="-122"/>
                 <a:cs typeface="Times New Roman" panose="02020603050405020304" pitchFamily="18" charset="0"/>
               </a:rPr>
-              <a:t>项目进展时间线</a:t>
+              <a:t>项目背景与进展</a:t>
             </a:r>
             <a:endParaRPr lang="zh-CN" altLang="en-US" sz="2400" b="1" dirty="0">
               <a:solidFill>
@@ -9125,7 +9125,7 @@
                 <a:ea typeface="方正小标宋简体" panose="03000509000000000000" charset="-122"/>
                 <a:cs typeface="Times New Roman" panose="02020603050405020304" pitchFamily="18" charset="0"/>
               </a:rPr>
-              <a:t>技术思路</a:t>
+              <a:t>技术架构与安全</a:t>
             </a:r>
             <a:endParaRPr lang="zh-CN" altLang="en-US" sz="2400" b="1" dirty="0">
               <a:solidFill>
@@ -9170,7 +9170,7 @@
                 <a:ea typeface="方正小标宋简体" panose="03000509000000000000" charset="-122"/>
                 <a:cs typeface="Times New Roman" panose="02020603050405020304" pitchFamily="18" charset="0"/>
               </a:rPr>
-              <a:t>现有工作</a:t>
+              <a:t>功能成果与验证</a:t>
             </a:r>
             <a:endParaRPr lang="zh-CN" altLang="en-US" sz="2400" b="1" dirty="0">
               <a:solidFill>
@@ -9226,7 +9226,7 @@
                 <a:ea typeface="方正小标宋简体" panose="03000509000000000000" charset="-122"/>
                 <a:cs typeface="Times New Roman" panose="02020603050405020304" pitchFamily="18" charset="0"/>
               </a:rPr>
-              <a:t>后续展望与优化方向</a:t>
+              <a:t>演示、边界与展望</a:t>
             </a:r>
             <a:endParaRPr lang="zh-CN" altLang="en-US" sz="2400" b="1" dirty="0">
               <a:solidFill>
@@ -9318,7 +9318,7 @@
                 </a:solidFill>
                 <a:latin typeface="方正小标宋简体" panose="03000509000000000000" charset="-122"/>
               </a:rPr>
-              <a:t>护栏 · 审计 · 最小权限</a:t>
+              <a:t>本地策略不可绕过</a:t>
             </a:r>
             <a:endParaRPr lang="zh-CN" altLang="en-US" sz="2400" b="1">
               <a:solidFill>
@@ -9360,7 +9360,7 @@
             </a:pPr>
             <a:r>
               <a:rPr sz="2400"/>
-              <a:t>每条指令先过输入侧意图筛查（高危关键词、敏感路径、命令注入），再由策略引擎按风险评分裁决为低/中/高三级；中风险签发一次性确认令牌，预演计划与实际执行严格一致，令牌限时且绑定会话，确认后二次复核策略。</a:t>
+              <a:t>危险意图在调用模型前拦截；模型输出仍按不可信输入处理。工具存在性、参数类型与范围、注入字符、敏感路径、服务白名单和保护列表全部由本地代码复核；中风险必须持一次性令牌，确认时再次应用当前策略。</a:t>
             </a:r>
             <a:endParaRPr sz="2400"/>
           </a:p>
@@ -9395,7 +9395,7 @@
                 </a:solidFill>
                 <a:latin typeface="黑体" panose="02010609060101010101" charset="-122"/>
               </a:rPr>
-              <a:t>双向护栏与三级风险</a:t>
+              <a:t>输入筛查、三级风险与确认</a:t>
             </a:r>
             <a:endParaRPr sz="2400" b="1">
               <a:solidFill>
@@ -9435,7 +9435,7 @@
                 </a:solidFill>
                 <a:latin typeface="黑体" panose="02010609060101010101" charset="-122"/>
               </a:rPr>
-              <a:t>思维链与哈希链审计</a:t>
+              <a:t>结构化决策轨迹与签名审计</a:t>
             </a:r>
             <a:endParaRPr sz="2400" b="1">
               <a:solidFill>
@@ -9475,7 +9475,7 @@
             </a:pPr>
             <a:r>
               <a:rPr sz="2400"/>
-              <a:t>每次请求完整记录上下文解析→意图筛查→工具选择→风险裁决→执行五步思维链，逐条写入哈希链防篡改审计日志，--verify-audit 可校验完整性；工具白名单 + 受管工作区 + 专用低权用户，杜绝任意 shell 与越权操作。</a:t>
+              <a:t>每次请求记录上下文解析、输入筛查、工具选择、风险裁决和执行结果等可复核事实；审计采用 SHA-256 链、HMAC、事件数量与末尾哈希锚点、轮转校验及递归脱敏，可发现内容修改、删除、尾部截断或签名缺失。</a:t>
             </a:r>
             <a:endParaRPr sz="2400"/>
           </a:p>
@@ -9730,7 +9730,7 @@
               <a:rPr sz="3600" b="1">
                 <a:latin typeface="微软雅黑" panose="020B0503020204020204" pitchFamily="34" charset="-122"/>
               </a:rPr>
-              <a:t>3.1 现有工作</a:t>
+              <a:t>4.1 当前核心功能</a:t>
             </a:r>
             <a:endParaRPr lang="zh-CN" altLang="en-US" sz="3600" b="1" dirty="0">
               <a:latin typeface="Times New Roman" panose="02020603050405020304" pitchFamily="18" charset="0"/>
@@ -9771,7 +9771,7 @@
                 <a:ea typeface="方正小标宋简体" panose="03000509000000000000" charset="-122"/>
                 <a:cs typeface="Times New Roman" panose="02020603050405020304" pitchFamily="18" charset="0"/>
               </a:rPr>
-              <a:t>项目进展时间线</a:t>
+              <a:t>项目背景与进展</a:t>
             </a:r>
             <a:endParaRPr lang="zh-CN" altLang="en-US" sz="2400" b="1" dirty="0">
               <a:solidFill>
@@ -9816,7 +9816,7 @@
                 <a:ea typeface="方正小标宋简体" panose="03000509000000000000" charset="-122"/>
                 <a:cs typeface="Times New Roman" panose="02020603050405020304" pitchFamily="18" charset="0"/>
               </a:rPr>
-              <a:t>技术思路</a:t>
+              <a:t>技术架构与安全</a:t>
             </a:r>
             <a:endParaRPr lang="zh-CN" altLang="en-US" sz="2400" b="1" dirty="0">
               <a:solidFill>
@@ -9861,7 +9861,7 @@
                 <a:ea typeface="方正小标宋简体" panose="03000509000000000000" charset="-122"/>
                 <a:cs typeface="Times New Roman" panose="02020603050405020304" pitchFamily="18" charset="0"/>
               </a:rPr>
-              <a:t>现有工作</a:t>
+              <a:t>功能成果与验证</a:t>
             </a:r>
             <a:endParaRPr lang="zh-CN" altLang="en-US" sz="2400" b="1" dirty="0">
               <a:solidFill>
@@ -9917,7 +9917,7 @@
                 <a:ea typeface="方正小标宋简体" panose="03000509000000000000" charset="-122"/>
                 <a:cs typeface="Times New Roman" panose="02020603050405020304" pitchFamily="18" charset="0"/>
               </a:rPr>
-              <a:t>后续展望与优化方向</a:t>
+              <a:t>演示、边界与展望</a:t>
             </a:r>
             <a:endParaRPr lang="zh-CN" altLang="en-US" sz="2400" b="1" dirty="0">
               <a:solidFill>
@@ -10009,7 +10009,7 @@
                 </a:solidFill>
                 <a:latin typeface="方正小标宋简体" panose="03000509000000000000" charset="-122"/>
               </a:rPr>
-              <a:t>安全运维核心能力</a:t>
+              <a:t>安全运维与证据驱动诊断</a:t>
             </a:r>
             <a:endParaRPr sz="3200" b="1">
               <a:solidFill>
@@ -10053,7 +10053,7 @@
               <a:rPr sz="2400">
                 <a:latin typeface="黑体" panose="02010609060101010101" charset="-122"/>
               </a:rPr>
-              <a:t>自然语言意图理解：DeepSeek 大模型 + 离线规则回退，支持多轮上下文与指代解析</a:t>
+              <a:t>25 个固定工具：系统、资源、进程、日志、网络、磁盘、用户、计划任务、软件包、服务与受管文件</a:t>
             </a:r>
             <a:endParaRPr sz="2400">
               <a:latin typeface="黑体" panose="02010609060101010101" charset="-122"/>
@@ -10071,7 +10071,7 @@
               <a:rPr sz="2400">
                 <a:latin typeface="黑体" panose="02010609060101010101" charset="-122"/>
               </a:rPr>
-              <a:t>三级风险策略 + 一次性确认令牌，低/中/高风险差异化处置，杜绝误操作</a:t>
+              <a:t>六类诊断先采集 CPU/内存/磁盘/端口/服务/日志证据，再按阈值和特征生成原因与建议</a:t>
             </a:r>
             <a:endParaRPr sz="2400">
               <a:latin typeface="黑体" panose="02010609060101010101" charset="-122"/>
@@ -10089,7 +10089,7 @@
               <a:rPr sz="2400">
                 <a:latin typeface="黑体" panose="02010609060101010101" charset="-122"/>
               </a:rPr>
-              <a:t>19+ 最小权限白名单工具：系统信息、资源指标、进程、端口、磁盘、服务、日志</a:t>
+              <a:t>LOW 直行；MEDIUM dry-run + 一次性令牌；HIGH、保护服务和非白名单服务拒绝</a:t>
             </a:r>
             <a:endParaRPr sz="2400">
               <a:latin typeface="黑体" panose="02010609060101010101" charset="-122"/>
@@ -10107,7 +10107,7 @@
               <a:rPr sz="2400">
                 <a:latin typeface="黑体" panose="02010609060101010101" charset="-122"/>
               </a:rPr>
-              <a:t>五步思维链 + 哈希链防篡改审计，--verify-audit 校验日志完整性</a:t>
+              <a:t>受管文件写前快照、原子写入和真实回滚；服务操作具备前后状态记录与 root 保护</a:t>
             </a:r>
             <a:endParaRPr sz="2400">
               <a:latin typeface="黑体" panose="02010609060101010101" charset="-122"/>
@@ -10364,7 +10364,7 @@
               <a:rPr sz="3600" b="1">
                 <a:latin typeface="微软雅黑" panose="020B0503020204020204" pitchFamily="34" charset="-122"/>
               </a:rPr>
-              <a:t>3.1 现有工作</a:t>
+              <a:t>4.2 多入口与交付能力</a:t>
             </a:r>
             <a:endParaRPr lang="zh-CN" altLang="en-US" sz="3600" b="1" dirty="0">
               <a:latin typeface="Times New Roman" panose="02020603050405020304" pitchFamily="18" charset="0"/>
@@ -10405,7 +10405,7 @@
                 <a:ea typeface="方正小标宋简体" panose="03000509000000000000" charset="-122"/>
                 <a:cs typeface="Times New Roman" panose="02020603050405020304" pitchFamily="18" charset="0"/>
               </a:rPr>
-              <a:t>项目进展时间线</a:t>
+              <a:t>项目背景与进展</a:t>
             </a:r>
             <a:endParaRPr lang="zh-CN" altLang="en-US" sz="2400" b="1" dirty="0">
               <a:solidFill>
@@ -10450,7 +10450,7 @@
                 <a:ea typeface="方正小标宋简体" panose="03000509000000000000" charset="-122"/>
                 <a:cs typeface="Times New Roman" panose="02020603050405020304" pitchFamily="18" charset="0"/>
               </a:rPr>
-              <a:t>技术思路</a:t>
+              <a:t>技术架构与安全</a:t>
             </a:r>
             <a:endParaRPr lang="zh-CN" altLang="en-US" sz="2400" b="1" dirty="0">
               <a:solidFill>
@@ -10495,7 +10495,7 @@
                 <a:ea typeface="方正小标宋简体" panose="03000509000000000000" charset="-122"/>
                 <a:cs typeface="Times New Roman" panose="02020603050405020304" pitchFamily="18" charset="0"/>
               </a:rPr>
-              <a:t>现有工作</a:t>
+              <a:t>功能成果与验证</a:t>
             </a:r>
             <a:endParaRPr lang="zh-CN" altLang="en-US" sz="2400" b="1" dirty="0">
               <a:solidFill>
@@ -10551,7 +10551,7 @@
                 <a:ea typeface="方正小标宋简体" panose="03000509000000000000" charset="-122"/>
                 <a:cs typeface="Times New Roman" panose="02020603050405020304" pitchFamily="18" charset="0"/>
               </a:rPr>
-              <a:t>后续展望与优化方向</a:t>
+              <a:t>演示、边界与展望</a:t>
             </a:r>
             <a:endParaRPr lang="zh-CN" altLang="en-US" sz="2400" b="1" dirty="0">
               <a:solidFill>
@@ -10643,7 +10643,7 @@
                 </a:solidFill>
                 <a:latin typeface="方正小标宋简体" panose="03000509000000000000" charset="-122"/>
               </a:rPr>
-              <a:t>协议接入与双入口演示</a:t>
+              <a:t>CLI、Web、MCP 共享同一安全内核</a:t>
             </a:r>
             <a:endParaRPr sz="3200" b="1">
               <a:solidFill>
@@ -10687,7 +10687,7 @@
               <a:rPr sz="2400">
                 <a:latin typeface="黑体" panose="02010609060101010101" charset="-122"/>
               </a:rPr>
-              <a:t>标准 MCP stdio 服务端：JSON-RPC 2.0，含 initialize 版本协商 / tools/list / tools/call / ping</a:t>
+              <a:t>CLI 用于脚本与演示；Web 提供登录、对话、确认、决策轨迹与审计筛选</a:t>
             </a:r>
             <a:endParaRPr sz="2400">
               <a:latin typeface="黑体" panose="02010609060101010101" charset="-122"/>
@@ -10705,7 +10705,7 @@
               <a:rPr sz="2400">
                 <a:latin typeface="黑体" panose="02010609060101010101" charset="-122"/>
               </a:rPr>
-              <a:t>每个工具带 inputSchema 与安全注解，MCP 契约测试覆盖 schema、错误码、参数校验</a:t>
+              <a:t>MCP 2025-11-25 提供标准生命周期、严格 Schema、annotations 与 safeops.confirm</a:t>
             </a:r>
             <a:endParaRPr sz="2400">
               <a:latin typeface="黑体" panose="02010609060101010101" charset="-122"/>
@@ -10723,7 +10723,7 @@
               <a:rPr sz="2400">
                 <a:latin typeface="黑体" panose="02010609060101010101" charset="-122"/>
               </a:rPr>
-              <a:t>CLI + Web 双入口，Web 按会话隔离上下文、慢请求互不阻塞、一键确认中风险</a:t>
+              <a:t>三种入口共享注册表、PolicyEngine、PendingActionStore 和签名审计</a:t>
             </a:r>
             <a:endParaRPr sz="2400">
               <a:latin typeface="黑体" panose="02010609060101010101" charset="-122"/>
@@ -10741,7 +10741,7 @@
               <a:rPr sz="2400">
                 <a:latin typeface="黑体" panose="02010609060101010101" charset="-122"/>
               </a:rPr>
-              <a:t>服务 start/stop/restart 在麒麟/Linux 真实执行 systemctl，受管文件写前快照可回滚</a:t>
+              <a:t>wheel 可在空工作目录运行；发布包校验关键文件并排除密钥与运行数据</a:t>
             </a:r>
             <a:endParaRPr sz="2400">
               <a:latin typeface="黑体" panose="02010609060101010101" charset="-122"/>
@@ -10999,14 +10999,14 @@
                 <a:latin typeface="Times New Roman" panose="02020603050405020304" pitchFamily="18" charset="0"/>
                 <a:cs typeface="Times New Roman" panose="02020603050405020304" pitchFamily="18" charset="0"/>
               </a:rPr>
-              <a:t>4.1</a:t>
+              <a:t>5.1 现场演示流程</a:t>
             </a:r>
             <a:r>
               <a:rPr lang="zh-CN" altLang="en-US" sz="3600" b="1" dirty="0">
                 <a:latin typeface="Times New Roman" panose="02020603050405020304" pitchFamily="18" charset="0"/>
                 <a:cs typeface="Times New Roman" panose="02020603050405020304" pitchFamily="18" charset="0"/>
               </a:rPr>
-              <a:t> 后续展望与优化方向</a:t>
+              <a:t/>
             </a:r>
             <a:endParaRPr lang="zh-CN" altLang="en-US" sz="3600" b="1" dirty="0">
               <a:latin typeface="Times New Roman" panose="02020603050405020304" pitchFamily="18" charset="0"/>
@@ -11048,7 +11048,7 @@
                 <a:ea typeface="方正小标宋简体" panose="03000509000000000000" charset="-122"/>
                 <a:cs typeface="Times New Roman" panose="02020603050405020304" pitchFamily="18" charset="0"/>
               </a:rPr>
-              <a:t>项目进展时间线</a:t>
+              <a:t>项目背景与进展</a:t>
             </a:r>
             <a:endParaRPr lang="zh-CN" altLang="en-US" sz="2400" b="1" dirty="0">
               <a:solidFill>
@@ -11093,7 +11093,7 @@
                 <a:ea typeface="方正小标宋简体" panose="03000509000000000000" charset="-122"/>
                 <a:cs typeface="Times New Roman" panose="02020603050405020304" pitchFamily="18" charset="0"/>
               </a:rPr>
-              <a:t>技术思路</a:t>
+              <a:t>技术架构与安全</a:t>
             </a:r>
             <a:endParaRPr lang="zh-CN" altLang="en-US" sz="2400" b="1" dirty="0">
               <a:solidFill>
@@ -11194,7 +11194,7 @@
                 <a:ea typeface="方正小标宋简体" panose="03000509000000000000" charset="-122"/>
                 <a:cs typeface="Times New Roman" panose="02020603050405020304" pitchFamily="18" charset="0"/>
               </a:rPr>
-              <a:t>后续展望与优化方向</a:t>
+              <a:t>演示、边界与展望</a:t>
             </a:r>
             <a:endParaRPr lang="zh-CN" altLang="en-US" sz="2400" b="1" dirty="0">
               <a:solidFill>
@@ -11238,7 +11238,7 @@
             </a:pPr>
             <a:r>
               <a:rPr sz="2200"/>
-              <a:t>完成麒麟实机验证与最小权限执行落地：当前核心链路已在开发机与 Ubuntu CI 完整跑通，</a:t>
+              <a:t>1. 配置自检：展示 0 个错误、0 个警告，并说明可在线或一键离线。</a:t>
             </a:r>
             <a:endParaRPr sz="2200"/>
           </a:p>
@@ -11262,7 +11262,7 @@
             </a:pPr>
             <a:r>
               <a:rPr sz="2200"/>
-              <a:t>下一步将在真实麒麟操作系统上执行 K01–K31 验证清单，覆盖 systemctl / journalctl / ss / rpm 等命令，</a:t>
+              <a:t>2. LOW 查询与诊断：系统信息、CPU/内存或端口，展开结构化决策轨迹。</a:t>
             </a:r>
             <a:endParaRPr sz="2200"/>
           </a:p>
@@ -11286,7 +11286,7 @@
             </a:pPr>
             <a:r>
               <a:rPr sz="2200"/>
-              <a:t>并落地专用低权用户 + sudo 白名单执行器，收敛 Agent 的实际操作权限边界。</a:t>
+              <a:t>3. MEDIUM 预演：重启 nginx 只返回 dry-run 和 action_id，不执行变更。</a:t>
             </a:r>
             <a:endParaRPr sz="2200"/>
           </a:p>
@@ -11310,7 +11310,7 @@
             </a:pPr>
             <a:r>
               <a:rPr sz="2200"/>
-              <a:t>目标：形成可复现的麒麟实机验证报告，证明安全护栏与运维能力在国产环境下稳定可用。</a:t>
+              <a:t>4. HIGH 拒绝 + 审计验签：拦截 /etc/passwd，演示 Web、MCP 与 verify-audit。</a:t>
             </a:r>
             <a:endParaRPr sz="2200"/>
           </a:p>
@@ -11566,14 +11566,14 @@
                 <a:latin typeface="Times New Roman" panose="02020603050405020304" pitchFamily="18" charset="0"/>
                 <a:cs typeface="Times New Roman" panose="02020603050405020304" pitchFamily="18" charset="0"/>
               </a:rPr>
-              <a:t>4.1</a:t>
+              <a:t>5.2 量化验收结果</a:t>
             </a:r>
             <a:r>
               <a:rPr lang="zh-CN" altLang="en-US" sz="3600" b="1" dirty="0">
                 <a:latin typeface="Times New Roman" panose="02020603050405020304" pitchFamily="18" charset="0"/>
                 <a:cs typeface="Times New Roman" panose="02020603050405020304" pitchFamily="18" charset="0"/>
               </a:rPr>
-              <a:t> 后续展望与优化方向</a:t>
+              <a:t/>
             </a:r>
             <a:endParaRPr lang="zh-CN" altLang="en-US" sz="3600" b="1" dirty="0">
               <a:latin typeface="Times New Roman" panose="02020603050405020304" pitchFamily="18" charset="0"/>
@@ -11615,7 +11615,7 @@
                 <a:ea typeface="方正小标宋简体" panose="03000509000000000000" charset="-122"/>
                 <a:cs typeface="Times New Roman" panose="02020603050405020304" pitchFamily="18" charset="0"/>
               </a:rPr>
-              <a:t>项目进展时间线</a:t>
+              <a:t>项目背景与进展</a:t>
             </a:r>
             <a:endParaRPr lang="zh-CN" altLang="en-US" sz="2400" b="1" dirty="0">
               <a:solidFill>
@@ -11660,7 +11660,7 @@
                 <a:ea typeface="方正小标宋简体" panose="03000509000000000000" charset="-122"/>
                 <a:cs typeface="Times New Roman" panose="02020603050405020304" pitchFamily="18" charset="0"/>
               </a:rPr>
-              <a:t>技术思路</a:t>
+              <a:t>技术架构与安全</a:t>
             </a:r>
             <a:endParaRPr lang="zh-CN" altLang="en-US" sz="2400" b="1" dirty="0">
               <a:solidFill>
@@ -11761,7 +11761,7 @@
                 <a:ea typeface="方正小标宋简体" panose="03000509000000000000" charset="-122"/>
                 <a:cs typeface="Times New Roman" panose="02020603050405020304" pitchFamily="18" charset="0"/>
               </a:rPr>
-              <a:t>后续展望与优化方向</a:t>
+              <a:t>演示、边界与展望</a:t>
             </a:r>
             <a:endParaRPr lang="zh-CN" altLang="en-US" sz="2400" b="1" dirty="0">
               <a:solidFill>
@@ -11805,7 +11805,7 @@
             </a:pPr>
             <a:r>
               <a:rPr sz="2200"/>
-              <a:t>扩展运维工具与故障自愈能力：当前已覆盖系统感知、指标采集、服务与文件管理等 19+ 工具。</a:t>
+              <a:t>自动化：217 项 Python + 7 项 Node 全部通过；综合覆盖率 72.3%。</a:t>
             </a:r>
             <a:endParaRPr sz="2200"/>
           </a:p>
@@ -11829,7 +11829,7 @@
             </a:pPr>
             <a:r>
               <a:rPr sz="2200"/>
-              <a:t>下一步将新增日志根因分析、资源阈值告警、常见故障一键诊断与受控自愈预案，形成“感知 → 诊断 → 建议 → 确认执行”的闭环。</a:t>
+              <a:t>真实进程：CLI LOW/MEDIUM/HIGH、Web API、MCP 25 工具握手与审计验签通过。</a:t>
             </a:r>
             <a:endParaRPr sz="2200"/>
           </a:p>
@@ -11853,9 +11853,15 @@
             </a:pPr>
             <a:r>
               <a:rPr sz="2200"/>
-              <a:t>并对权限不足、命令缺失、服务异常等情况建立稳健的降级与回滚策略。</a:t>
+              <a:t>安装交付：wheel 隔离安装成功；95 条目提交包通过禁止项检查。</a:t>
             </a:r>
             <a:endParaRPr sz="2200"/>
+          </a:p>
+          <a:p/>
+          <a:p>
+            <a:r>
+              <a:t>在线模型：deepseek-chat 真实请求选择 LOW 工具 system.info 并执行成功。</a:t>
+            </a:r>
           </a:p>
         </p:txBody>
       </p:sp>
@@ -12109,14 +12115,14 @@
                 <a:latin typeface="Times New Roman" panose="02020603050405020304" pitchFamily="18" charset="0"/>
                 <a:cs typeface="Times New Roman" panose="02020603050405020304" pitchFamily="18" charset="0"/>
               </a:rPr>
-              <a:t>4.1</a:t>
+              <a:t>5.3 已知边界与下一步</a:t>
             </a:r>
             <a:r>
               <a:rPr lang="zh-CN" altLang="en-US" sz="3600" b="1" dirty="0">
                 <a:latin typeface="Times New Roman" panose="02020603050405020304" pitchFamily="18" charset="0"/>
                 <a:cs typeface="Times New Roman" panose="02020603050405020304" pitchFamily="18" charset="0"/>
               </a:rPr>
-              <a:t> 后续展望与优化方向</a:t>
+              <a:t/>
             </a:r>
             <a:endParaRPr lang="zh-CN" altLang="en-US" sz="3600" b="1" dirty="0">
               <a:latin typeface="Times New Roman" panose="02020603050405020304" pitchFamily="18" charset="0"/>
@@ -12158,7 +12164,7 @@
                 <a:ea typeface="方正小标宋简体" panose="03000509000000000000" charset="-122"/>
                 <a:cs typeface="Times New Roman" panose="02020603050405020304" pitchFamily="18" charset="0"/>
               </a:rPr>
-              <a:t>项目进展时间线</a:t>
+              <a:t>项目背景与进展</a:t>
             </a:r>
             <a:endParaRPr lang="zh-CN" altLang="en-US" sz="2400" b="1" dirty="0">
               <a:solidFill>
@@ -12203,7 +12209,7 @@
                 <a:ea typeface="方正小标宋简体" panose="03000509000000000000" charset="-122"/>
                 <a:cs typeface="Times New Roman" panose="02020603050405020304" pitchFamily="18" charset="0"/>
               </a:rPr>
-              <a:t>技术思路</a:t>
+              <a:t>技术架构与安全</a:t>
             </a:r>
             <a:endParaRPr lang="zh-CN" altLang="en-US" sz="2400" b="1" dirty="0">
               <a:solidFill>
@@ -12304,7 +12310,7 @@
                 <a:ea typeface="方正小标宋简体" panose="03000509000000000000" charset="-122"/>
                 <a:cs typeface="Times New Roman" panose="02020603050405020304" pitchFamily="18" charset="0"/>
               </a:rPr>
-              <a:t>后续展望与优化方向</a:t>
+              <a:t>演示、边界与展望</a:t>
             </a:r>
             <a:endParaRPr lang="zh-CN" altLang="en-US" sz="2400" b="1" dirty="0">
               <a:solidFill>
@@ -12348,7 +12354,7 @@
             </a:pPr>
             <a:r>
               <a:rPr sz="2400"/>
-              <a:t>面向运维的多轮对话与可视化增强：</a:t>
+              <a:t>已知边界：已完成 Windows 软件级验收与在线模型验证，尚未完成麒麟硬件实机测试。</a:t>
             </a:r>
             <a:endParaRPr sz="2400"/>
           </a:p>
@@ -12372,7 +12378,7 @@
             </a:pPr>
             <a:r>
               <a:rPr sz="2200"/>
-              <a:t>在现有 CLI / Web 双入口基础上，强化多轮对话运维体验，支持基于上下文的连续追问、参数追问与批量任务编排。</a:t>
+              <a:t>下一步一：在真实麒麟环境执行 systemctl / journalctl / ss / rpm 验证清单。</a:t>
             </a:r>
             <a:endParaRPr sz="2200"/>
           </a:p>
@@ -12396,17 +12402,23 @@
             </a:pPr>
             <a:r>
               <a:rPr sz="2200"/>
-              <a:t>同时增强 Web 工作台：风险态势看板、审计时间线检索、思维链可视化回放</a:t>
+              <a:t>下一步二：落地专用低权账号与 sudo 白名单，扩展告警联动和受控自愈。</a:t>
             </a:r>
             <a:r>
               <a:rPr lang="zh-CN" sz="2200"/>
-              <a:t>，</a:t>
+              <a:t/>
             </a:r>
             <a:r>
               <a:rPr sz="2200"/>
-              <a:t>把 SafeOps 从“命令式运维工具”升级为“可解释、可信赖的智能运维平台”。</a:t>
+              <a:t/>
             </a:r>
             <a:endParaRPr sz="2200"/>
+          </a:p>
+          <a:p/>
+          <a:p>
+            <a:r>
+              <a:t>答辩口径：已实现功能以自动化和进程证据为准；实机能力明确列为验证计划。</a:t>
+            </a:r>
           </a:p>
         </p:txBody>
       </p:sp>
@@ -13337,7 +13349,7 @@
                 <a:latin typeface="方正小标宋简体" panose="03000509000000000000" charset="-122"/>
                 <a:ea typeface="方正小标宋简体" panose="03000509000000000000" charset="-122"/>
               </a:rPr>
-              <a:t>项目进展时间线</a:t>
+              <a:t>赛题背景与目标</a:t>
             </a:r>
             <a:endParaRPr lang="zh-CN" altLang="en-US" sz="2800">
               <a:latin typeface="方正小标宋简体" panose="03000509000000000000" charset="-122"/>
@@ -13377,7 +13389,7 @@
                 <a:latin typeface="方正小标宋简体" panose="03000509000000000000" charset="-122"/>
                 <a:ea typeface="方正小标宋简体" panose="03000509000000000000" charset="-122"/>
               </a:rPr>
-              <a:t>技术思路</a:t>
+              <a:t>技术架构与安全</a:t>
             </a:r>
             <a:endParaRPr lang="zh-CN" altLang="en-US" sz="2800">
               <a:latin typeface="方正小标宋简体" panose="03000509000000000000" charset="-122"/>
@@ -13422,7 +13434,7 @@
                 <a:latin typeface="方正小标宋简体" panose="03000509000000000000" charset="-122"/>
                 <a:ea typeface="方正小标宋简体" panose="03000509000000000000" charset="-122"/>
               </a:rPr>
-              <a:t>现有工作</a:t>
+              <a:t>功能成果与验证</a:t>
             </a:r>
             <a:endParaRPr lang="zh-CN" altLang="en-US" sz="2800">
               <a:latin typeface="方正小标宋简体" panose="03000509000000000000" charset="-122"/>
@@ -13462,7 +13474,7 @@
                 <a:latin typeface="方正小标宋简体" panose="03000509000000000000" charset="-122"/>
                 <a:ea typeface="方正小标宋简体" panose="03000509000000000000" charset="-122"/>
               </a:rPr>
-              <a:t>后续展望与优化方向</a:t>
+              <a:t>演示、边界与展望</a:t>
             </a:r>
             <a:endParaRPr lang="zh-CN" altLang="en-US" sz="2800">
               <a:latin typeface="方正小标宋简体" panose="03000509000000000000" charset="-122"/>
@@ -13709,7 +13721,7 @@
                 <a:ea typeface="方正小标宋简体" panose="03000509000000000000" charset="-122"/>
                 <a:cs typeface="Times New Roman" panose="02020603050405020304" pitchFamily="18" charset="0"/>
               </a:rPr>
-              <a:t>项目进展时间线</a:t>
+              <a:t>项目背景与进展</a:t>
             </a:r>
             <a:endParaRPr lang="zh-CN" altLang="en-US" sz="2400" b="1" dirty="0">
               <a:solidFill>
@@ -13754,7 +13766,7 @@
                 <a:ea typeface="方正小标宋简体" panose="03000509000000000000" charset="-122"/>
                 <a:cs typeface="Times New Roman" panose="02020603050405020304" pitchFamily="18" charset="0"/>
               </a:rPr>
-              <a:t>技术思路</a:t>
+              <a:t>技术架构与安全</a:t>
             </a:r>
             <a:endParaRPr lang="zh-CN" altLang="en-US" sz="2400" b="1" dirty="0">
               <a:solidFill>
@@ -13799,7 +13811,7 @@
                 <a:ea typeface="方正小标宋简体" panose="03000509000000000000" charset="-122"/>
                 <a:cs typeface="Times New Roman" panose="02020603050405020304" pitchFamily="18" charset="0"/>
               </a:rPr>
-              <a:t>现有工作</a:t>
+              <a:t>功能成果与验证</a:t>
             </a:r>
             <a:endParaRPr lang="zh-CN" altLang="en-US" sz="2400" b="1" dirty="0">
               <a:solidFill>
@@ -13855,7 +13867,7 @@
                 <a:ea typeface="方正小标宋简体" panose="03000509000000000000" charset="-122"/>
                 <a:cs typeface="Times New Roman" panose="02020603050405020304" pitchFamily="18" charset="0"/>
               </a:rPr>
-              <a:t>后续展望与优化方向</a:t>
+              <a:t>演示、边界与展望</a:t>
             </a:r>
             <a:endParaRPr lang="zh-CN" altLang="en-US" sz="2400" b="1" dirty="0">
               <a:solidFill>
@@ -14042,7 +14054,7 @@
                 </a:solidFill>
                 <a:latin typeface="微软雅黑" panose="020B0503020204020204" pitchFamily="34" charset="-122"/>
               </a:rPr>
-              <a:t>目标概述：</a:t>
+              <a:t>目标：在自然语言与麒麟/Linux 运维之间建立一条可控、可解释、可追溯的执行链。</a:t>
             </a:r>
             <a:endParaRPr sz="2400" b="1">
               <a:solidFill>
@@ -14064,7 +14076,7 @@
                 </a:solidFill>
                 <a:latin typeface="微软雅黑" panose="020B0503020204020204" pitchFamily="34" charset="-122"/>
               </a:rPr>
-              <a:t>本项目面向国产麒麟操作系统运维场景，构建一套“自然语言驱动、安全护栏优先”的智能运维 Agent（SafeOps Agent）。系统将运维人员的自然语言指令交由大模型理解意图，经输入/输出双向风险过滤后，映射到最小权限白名单工具执行，全程记录五步思维链与哈希链防篡改审计日志；在低风险直执行、中风险确认令牌、高风险拒绝的三级策略下杜绝误操作，实现高效、可解释、可追溯的对话式运维。</a:t>
+              <a:t>方案：模型或离线规则只选择候选工具；25 个固定工具与本地策略完成参数校验和 LOW/MEDIUM/HIGH 裁决；一次性令牌保证预演与执行一致；CLI、Web、MCP 全部进入脱敏、SHA/HMAC 签名审计。</a:t>
             </a:r>
             <a:endParaRPr sz="2400" b="1">
               <a:solidFill>
@@ -14313,7 +14325,7 @@
                 <a:ea typeface="方正小标宋简体" panose="03000509000000000000" charset="-122"/>
                 <a:cs typeface="Times New Roman" panose="02020603050405020304" pitchFamily="18" charset="0"/>
               </a:rPr>
-              <a:t>项目进展时间线</a:t>
+              <a:t>项目背景与进展</a:t>
             </a:r>
             <a:endParaRPr lang="zh-CN" altLang="en-US" sz="2400" b="1" dirty="0">
               <a:solidFill>
@@ -14358,7 +14370,7 @@
                 <a:ea typeface="方正小标宋简体" panose="03000509000000000000" charset="-122"/>
                 <a:cs typeface="Times New Roman" panose="02020603050405020304" pitchFamily="18" charset="0"/>
               </a:rPr>
-              <a:t>技术思路</a:t>
+              <a:t>技术架构与安全</a:t>
             </a:r>
             <a:endParaRPr lang="zh-CN" altLang="en-US" sz="2400" b="1" dirty="0">
               <a:solidFill>
@@ -14403,7 +14415,7 @@
                 <a:ea typeface="方正小标宋简体" panose="03000509000000000000" charset="-122"/>
                 <a:cs typeface="Times New Roman" panose="02020603050405020304" pitchFamily="18" charset="0"/>
               </a:rPr>
-              <a:t>现有工作</a:t>
+              <a:t>功能成果与验证</a:t>
             </a:r>
             <a:endParaRPr lang="zh-CN" altLang="en-US" sz="2400" b="1" dirty="0">
               <a:solidFill>
@@ -14459,7 +14471,7 @@
                 <a:ea typeface="方正小标宋简体" panose="03000509000000000000" charset="-122"/>
                 <a:cs typeface="Times New Roman" panose="02020603050405020304" pitchFamily="18" charset="0"/>
               </a:rPr>
-              <a:t>后续展望与优化方向</a:t>
+              <a:t>演示、边界与展望</a:t>
             </a:r>
             <a:endParaRPr lang="zh-CN" altLang="en-US" sz="2400" b="1" dirty="0">
               <a:solidFill>
@@ -14565,7 +14577,7 @@
               <a:rPr sz="3600" b="1">
                 <a:latin typeface="微软雅黑" panose="020B0503020204020204" pitchFamily="34" charset="-122"/>
               </a:rPr>
-              <a:t>1.1 研发阶段划分与工作节奏</a:t>
+              <a:t>1.2 已完成研发阶段</a:t>
             </a:r>
             <a:endParaRPr sz="3600" b="1">
               <a:latin typeface="微软雅黑" panose="020B0503020204020204" pitchFamily="34" charset="-122"/>
@@ -14602,7 +14614,7 @@
                 </a:solidFill>
                 <a:latin typeface="方正小标宋简体" panose="03000509000000000000" charset="-122"/>
               </a:rPr>
-              <a:t>研发阶段划分</a:t>
+              <a:t>从安全闭环到可交付系统</a:t>
             </a:r>
             <a:endParaRPr lang="zh-CN" altLang="en-US" sz="2400" b="1">
               <a:solidFill>
@@ -14780,7 +14792,7 @@
                           </a:solidFill>
                           <a:latin typeface="方正小标宋简体" panose="03000509000000000000" charset="-122"/>
                         </a:rPr>
-                        <a:t>工作重点</a:t>
+                        <a:t>已完成工作</a:t>
                       </a:r>
                       <a:endParaRPr sz="2400" b="1">
                         <a:solidFill>
@@ -14897,7 +14909,7 @@
                       </a:pPr>
                       <a:r>
                         <a:rPr sz="2000"/>
-                        <a:t>MVP 安全运维闭环</a:t>
+                        <a:t>受控主链路</a:t>
                       </a:r>
                       <a:endParaRPr sz="2000"/>
                     </a:p>
@@ -14947,7 +14959,7 @@
                       </a:pPr>
                       <a:r>
                         <a:rPr sz="2000"/>
-                        <a:t>cli/agent/policy/tools 主链路，规则意图理解与三级风险策略</a:t>
+                        <a:t>CLI / Agent / Policy / Tool Registry；25 个固定工具，无任意 Shell</a:t>
                       </a:r>
                       <a:endParaRPr sz="2000"/>
                     </a:p>
@@ -15065,7 +15077,7 @@
                       </a:pPr>
                       <a:r>
                         <a:rPr sz="2000"/>
-                        <a:t>双向护栏与审计链</a:t>
+                        <a:t>确认与可信审计</a:t>
                       </a:r>
                       <a:endParaRPr sz="2000"/>
                     </a:p>
@@ -15121,7 +15133,7 @@
                       </a:pPr>
                       <a:r>
                         <a:rPr sz="2000"/>
-                        <a:t>输入/输出双向护栏、五步思维链、哈希链防篡改审计</a:t>
+                        <a:t>三级风险、一次性令牌、受管文件快照回滚、SHA/HMAC 与持久化锚点</a:t>
                       </a:r>
                       <a:endParaRPr sz="2000"/>
                     </a:p>
@@ -15239,7 +15251,7 @@
                       </a:pPr>
                       <a:r>
                         <a:rPr sz="2000"/>
-                        <a:t>大模型与 MCP 协议</a:t>
+                        <a:t>智能路由与 MCP</a:t>
                       </a:r>
                       <a:endParaRPr sz="2000"/>
                     </a:p>
@@ -15295,7 +15307,7 @@
                       </a:pPr>
                       <a:r>
                         <a:rPr sz="2000"/>
-                        <a:t>DeepSeek 意图理解 + 离线回退、标准 JSON-RPC 2.0 MCP stdio 服务端</a:t>
+                        <a:t>DeepSeek/OpenAI 兼容 Provider + 离线规则；MCP 2025-11-25</a:t>
                       </a:r>
                       <a:endParaRPr sz="2000"/>
                     </a:p>
@@ -15413,7 +15425,7 @@
                       </a:pPr>
                       <a:r>
                         <a:rPr sz="2000"/>
-                        <a:t>确认令牌与 Web 工作台</a:t>
+                        <a:t>Web 与工程交付</a:t>
                       </a:r>
                       <a:endParaRPr sz="2000"/>
                     </a:p>
@@ -15469,7 +15481,7 @@
                       </a:pPr>
                       <a:r>
                         <a:rPr sz="2000"/>
-                        <a:t>一次性确认令牌、受管工作区回滚、CLI/Web 双入口演示</a:t>
+                        <a:t>TLS/认证/会话/SSE；wheel 内置资源、自动测试与发布包校验</a:t>
                       </a:r>
                       <a:endParaRPr sz="2000"/>
                     </a:p>
@@ -15752,7 +15764,7 @@
                 <a:ea typeface="方正小标宋简体" panose="03000509000000000000" charset="-122"/>
                 <a:cs typeface="Times New Roman" panose="02020603050405020304" pitchFamily="18" charset="0"/>
               </a:rPr>
-              <a:t>项目进展时间线</a:t>
+              <a:t>项目背景与进展</a:t>
             </a:r>
             <a:endParaRPr lang="zh-CN" altLang="en-US" sz="2400" b="1" dirty="0">
               <a:solidFill>
@@ -15797,7 +15809,7 @@
                 <a:ea typeface="方正小标宋简体" panose="03000509000000000000" charset="-122"/>
                 <a:cs typeface="Times New Roman" panose="02020603050405020304" pitchFamily="18" charset="0"/>
               </a:rPr>
-              <a:t>技术思路</a:t>
+              <a:t>技术架构与安全</a:t>
             </a:r>
             <a:endParaRPr lang="zh-CN" altLang="en-US" sz="2400" b="1" dirty="0">
               <a:solidFill>
@@ -15842,7 +15854,7 @@
                 <a:ea typeface="方正小标宋简体" panose="03000509000000000000" charset="-122"/>
                 <a:cs typeface="Times New Roman" panose="02020603050405020304" pitchFamily="18" charset="0"/>
               </a:rPr>
-              <a:t>现有工作</a:t>
+              <a:t>功能成果与验证</a:t>
             </a:r>
             <a:endParaRPr lang="zh-CN" altLang="en-US" sz="2400" b="1" dirty="0">
               <a:solidFill>
@@ -15898,7 +15910,7 @@
                 <a:ea typeface="方正小标宋简体" panose="03000509000000000000" charset="-122"/>
                 <a:cs typeface="Times New Roman" panose="02020603050405020304" pitchFamily="18" charset="0"/>
               </a:rPr>
-              <a:t>后续展望与优化方向</a:t>
+              <a:t>演示、边界与展望</a:t>
             </a:r>
             <a:endParaRPr lang="zh-CN" altLang="en-US" sz="2400" b="1" dirty="0">
               <a:solidFill>
@@ -16004,7 +16016,7 @@
               <a:rPr sz="3600" b="1">
                 <a:latin typeface="微软雅黑" panose="020B0503020204020204" pitchFamily="34" charset="-122"/>
               </a:rPr>
-              <a:t>1.1 研发阶段划分与工作节奏</a:t>
+              <a:t>1.3 工程质量与验收</a:t>
             </a:r>
             <a:endParaRPr sz="3600" b="1">
               <a:latin typeface="微软雅黑" panose="020B0503020204020204" pitchFamily="34" charset="-122"/>
@@ -16041,7 +16053,7 @@
                 </a:solidFill>
                 <a:latin typeface="方正小标宋简体" panose="03000509000000000000" charset="-122"/>
               </a:rPr>
-              <a:t>质量保障与工程化</a:t>
+              <a:t>自动化、进程联调与发布验证</a:t>
             </a:r>
             <a:endParaRPr lang="zh-CN" altLang="en-US" sz="2400" b="1">
               <a:solidFill>
@@ -16158,7 +16170,7 @@
                           </a:solidFill>
                           <a:latin typeface="方正小标宋简体" panose="03000509000000000000" charset="-122"/>
                         </a:rPr>
-                        <a:t>目标</a:t>
+                        <a:t>当前结果</a:t>
                       </a:r>
                       <a:endParaRPr lang="zh-CN" altLang="en-US" sz="2400" b="1">
                         <a:solidFill>
@@ -16219,7 +16231,7 @@
                           </a:solidFill>
                           <a:latin typeface="方正小标宋简体" panose="03000509000000000000" charset="-122"/>
                         </a:rPr>
-                        <a:t>工作重点</a:t>
+                        <a:t>验证内容</a:t>
                       </a:r>
                       <a:endParaRPr sz="2400" b="1">
                         <a:solidFill>
@@ -16281,7 +16293,7 @@
                           </a:solidFill>
                           <a:latin typeface="方正小标宋简体" panose="03000509000000000000" charset="-122"/>
                         </a:rPr>
-                        <a:t>质量保障</a:t>
+                        <a:t>自动化质量</a:t>
                       </a:r>
                       <a:endParaRPr sz="2400" b="0">
                         <a:solidFill>
@@ -16336,7 +16348,7 @@
                       </a:pPr>
                       <a:r>
                         <a:rPr sz="2000"/>
-                        <a:t>回归可持续</a:t>
+                        <a:t>217 Python + 7 Node</a:t>
                       </a:r>
                       <a:endParaRPr lang="zh-CN" altLang="en-US" sz="2000" dirty="0">
                         <a:solidFill>
@@ -16390,7 +16402,7 @@
                       </a:pPr>
                       <a:r>
                         <a:rPr sz="2000"/>
-                        <a:t>发现边界问题即固化为规则与单元测试，当前 130+ 个 unittest 全部离线通过</a:t>
+                        <a:t>综合覆盖率 72.3%，CI 门槛 70%；ResourceWarning 严格模式</a:t>
                       </a:r>
                       <a:endParaRPr lang="zh-CN" altLang="en-US" sz="2000" dirty="0">
                         <a:solidFill>
@@ -16451,7 +16463,7 @@
                           </a:solidFill>
                           <a:latin typeface="方正小标宋简体" panose="03000509000000000000" charset="-122"/>
                         </a:rPr>
-                        <a:t>性能与复现</a:t>
+                        <a:t>进程与发布</a:t>
                       </a:r>
                       <a:endParaRPr sz="2400" b="0">
                         <a:solidFill>
@@ -16512,7 +16524,7 @@
                       </a:pPr>
                       <a:r>
                         <a:rPr sz="2000"/>
-                        <a:t>可离线、可复现</a:t>
+                        <a:t>全链路通过</a:t>
                       </a:r>
                       <a:endParaRPr sz="2000"/>
                     </a:p>
@@ -16568,7 +16580,7 @@
                       </a:pPr>
                       <a:r>
                         <a:rPr sz="2000"/>
-                        <a:t>大模型 8s 超时 + 失败自动回退规则；SAFEOPS_LLM_DISABLED 一键离线复现</a:t>
+                        <a:t>CLI/Web/MCP、审计验签、wheel 隔离安装、95 条目提交包</a:t>
                       </a:r>
                       <a:endParaRPr sz="2000"/>
                     </a:p>
@@ -16851,7 +16863,7 @@
                 <a:ea typeface="方正小标宋简体" panose="03000509000000000000" charset="-122"/>
                 <a:cs typeface="Times New Roman" panose="02020603050405020304" pitchFamily="18" charset="0"/>
               </a:rPr>
-              <a:t>项目进展时间线</a:t>
+              <a:t>项目背景与进展</a:t>
             </a:r>
             <a:endParaRPr lang="zh-CN" altLang="en-US" sz="2400" b="1" dirty="0">
               <a:solidFill>
@@ -16896,7 +16908,7 @@
                 <a:ea typeface="方正小标宋简体" panose="03000509000000000000" charset="-122"/>
                 <a:cs typeface="Times New Roman" panose="02020603050405020304" pitchFamily="18" charset="0"/>
               </a:rPr>
-              <a:t>技术思路</a:t>
+              <a:t>技术架构与安全</a:t>
             </a:r>
             <a:endParaRPr lang="zh-CN" altLang="en-US" sz="2400" b="1" dirty="0">
               <a:solidFill>
@@ -16941,7 +16953,7 @@
                 <a:ea typeface="方正小标宋简体" panose="03000509000000000000" charset="-122"/>
                 <a:cs typeface="Times New Roman" panose="02020603050405020304" pitchFamily="18" charset="0"/>
               </a:rPr>
-              <a:t>现有工作</a:t>
+              <a:t>功能成果与验证</a:t>
             </a:r>
             <a:endParaRPr lang="zh-CN" altLang="en-US" sz="2400" b="1" dirty="0">
               <a:solidFill>
@@ -16997,7 +17009,7 @@
                 <a:ea typeface="方正小标宋简体" panose="03000509000000000000" charset="-122"/>
                 <a:cs typeface="Times New Roman" panose="02020603050405020304" pitchFamily="18" charset="0"/>
               </a:rPr>
-              <a:t>后续展望与优化方向</a:t>
+              <a:t>演示、边界与展望</a:t>
             </a:r>
             <a:endParaRPr lang="zh-CN" altLang="en-US" sz="2400" b="1" dirty="0">
               <a:solidFill>
@@ -17106,7 +17118,7 @@
               <a:rPr sz="2800" b="1">
                 <a:latin typeface="微软雅黑" panose="020B0503020204020204" pitchFamily="34" charset="-122"/>
               </a:rPr>
-              <a:t>1.2 从规则闭环到安全护栏：总体研发过程</a:t>
+              <a:t>2.1 安全运维闭环与可信审计</a:t>
             </a:r>
             <a:endParaRPr sz="2800" b="1">
               <a:latin typeface="微软雅黑" panose="020B0503020204020204" pitchFamily="34" charset="-122"/>
@@ -17143,7 +17155,7 @@
                 </a:solidFill>
                 <a:latin typeface="方正小标宋简体" panose="03000509000000000000" charset="-122"/>
               </a:rPr>
-              <a:t>阶段一：MVP 安全运维闭环</a:t>
+              <a:t>受控执行主链路</a:t>
             </a:r>
             <a:endParaRPr lang="zh-CN" altLang="en-US" sz="2400" b="1">
               <a:solidFill>
@@ -17198,7 +17210,7 @@
                 </a:solidFill>
                 <a:latin typeface="微软雅黑" panose="020B0503020204020204" pitchFamily="34" charset="-122"/>
               </a:rPr>
-              <a:t>搭建 cli / agent / policy / tools 主链路</a:t>
+              <a:t>输入高危筛查 → LLM/规则选择候选 → 注册表与 Schema 校验</a:t>
             </a:r>
             <a:endParaRPr lang="en-US" altLang="zh-CN" sz="2000">
               <a:solidFill>
@@ -17224,7 +17236,7 @@
                 </a:solidFill>
                 <a:latin typeface="微软雅黑" panose="020B0503020204020204" pitchFamily="34" charset="-122"/>
               </a:rPr>
-              <a:t>实现 19+ 最小权限白名单工具，禁任意 shell 执行</a:t>
+              <a:t>PolicyEngine：LOW 只读执行 / MEDIUM 预演确认 / HIGH 拒绝</a:t>
             </a:r>
             <a:endParaRPr sz="2000">
               <a:solidFill>
@@ -17248,7 +17260,7 @@
                 </a:solidFill>
                 <a:latin typeface="微软雅黑" panose="020B0503020204020204" pitchFamily="34" charset="-122"/>
               </a:rPr>
-              <a:t>打通“自然语言 → 意图识别 → 风险裁决 → 工具执行”闭环</a:t>
+              <a:t>模型没有授权权；真实操作只能进入固定白名单 handler</a:t>
             </a:r>
             <a:endParaRPr sz="2000">
               <a:solidFill>
@@ -17338,7 +17350,7 @@
                 </a:solidFill>
                 <a:latin typeface="方正小标宋简体" panose="03000509000000000000" charset="-122"/>
               </a:rPr>
-              <a:t>阶段二：双向护栏与审计链</a:t>
+              <a:t>确认与审计闭环</a:t>
             </a:r>
             <a:endParaRPr sz="2400" b="1">
               <a:solidFill>
@@ -17385,7 +17397,7 @@
                 </a:solidFill>
                 <a:latin typeface="微软雅黑" panose="020B0503020204020204" pitchFamily="34" charset="-122"/>
               </a:rPr>
-              <a:t>新增输入/输出双向意图过滤，拦截高危关键词与敏感路径</a:t>
+              <a:t>MEDIUM 保存已裁决的 tool + args，签发十分钟、会话绑定的一次性令牌</a:t>
             </a:r>
             <a:endParaRPr lang="en-US" altLang="zh-CN" sz="2000">
               <a:solidFill>
@@ -17411,7 +17423,7 @@
                 </a:solidFill>
                 <a:latin typeface="微软雅黑" panose="020B0503020204020204" pitchFamily="34" charset="-122"/>
               </a:rPr>
-              <a:t>建立五步思维链审计与哈希链防篡改机制</a:t>
+              <a:t>确认阶段不重跑意图识别，重新应用当前策略后精确执行保存动作</a:t>
             </a:r>
             <a:endParaRPr sz="2000">
               <a:solidFill>
@@ -17435,7 +17447,7 @@
                 </a:solidFill>
                 <a:latin typeface="微软雅黑" panose="020B0503020204020204" pitchFamily="34" charset="-122"/>
               </a:rPr>
-              <a:t>三级风险策略：低风险直执行 / 中风险确认 / 高风险拒绝</a:t>
+              <a:t>结果进入脱敏、SHA-256 链、HMAC、持久化锚点与轮转校验</a:t>
             </a:r>
             <a:endParaRPr sz="2000">
               <a:solidFill>
@@ -17684,7 +17696,7 @@
                 <a:ea typeface="方正小标宋简体" panose="03000509000000000000" charset="-122"/>
                 <a:cs typeface="Times New Roman" panose="02020603050405020304" pitchFamily="18" charset="0"/>
               </a:rPr>
-              <a:t>项目进展时间线</a:t>
+              <a:t>项目背景与进展</a:t>
             </a:r>
             <a:endParaRPr lang="zh-CN" altLang="en-US" sz="2400" b="1" dirty="0">
               <a:solidFill>
@@ -17729,7 +17741,7 @@
                 <a:ea typeface="方正小标宋简体" panose="03000509000000000000" charset="-122"/>
                 <a:cs typeface="Times New Roman" panose="02020603050405020304" pitchFamily="18" charset="0"/>
               </a:rPr>
-              <a:t>技术思路</a:t>
+              <a:t>技术架构与安全</a:t>
             </a:r>
             <a:endParaRPr lang="zh-CN" altLang="en-US" sz="2400" b="1" dirty="0">
               <a:solidFill>
@@ -17774,7 +17786,7 @@
                 <a:ea typeface="方正小标宋简体" panose="03000509000000000000" charset="-122"/>
                 <a:cs typeface="Times New Roman" panose="02020603050405020304" pitchFamily="18" charset="0"/>
               </a:rPr>
-              <a:t>现有工作</a:t>
+              <a:t>功能成果与验证</a:t>
             </a:r>
             <a:endParaRPr lang="zh-CN" altLang="en-US" sz="2400" b="1" dirty="0">
               <a:solidFill>
@@ -17830,7 +17842,7 @@
                 <a:ea typeface="方正小标宋简体" panose="03000509000000000000" charset="-122"/>
                 <a:cs typeface="Times New Roman" panose="02020603050405020304" pitchFamily="18" charset="0"/>
               </a:rPr>
-              <a:t>后续展望与优化方向</a:t>
+              <a:t>演示、边界与展望</a:t>
             </a:r>
             <a:endParaRPr lang="zh-CN" altLang="en-US" sz="2400" b="1" dirty="0">
               <a:solidFill>
@@ -17940,7 +17952,7 @@
               <a:rPr sz="3600" b="1">
                 <a:latin typeface="微软雅黑" panose="020B0503020204020204" pitchFamily="34" charset="-122"/>
               </a:rPr>
-              <a:t>1.2 从规则闭环到安全护栏：总体研发过程</a:t>
+              <a:t>2.2 大模型、MCP 与 Web 工作台</a:t>
             </a:r>
             <a:endParaRPr sz="3600" b="1">
               <a:latin typeface="微软雅黑" panose="020B0503020204020204" pitchFamily="34" charset="-122"/>
@@ -17977,7 +17989,7 @@
                 </a:solidFill>
                 <a:latin typeface="方正小标宋简体" panose="03000509000000000000" charset="-122"/>
               </a:rPr>
-              <a:t>阶段三：大模型意图理解与 MCP 协议</a:t>
+              <a:t>智能路由与协议接入</a:t>
             </a:r>
             <a:endParaRPr sz="2400" b="1">
               <a:solidFill>
@@ -18024,7 +18036,7 @@
                 </a:solidFill>
                 <a:latin typeface="微软雅黑" panose="020B0503020204020204" pitchFamily="34" charset="-122"/>
               </a:rPr>
-              <a:t>实现规则意图识别与参数抽取，支持多轮上下文与指代解析</a:t>
+              <a:t>DeepSeek/OpenAI 兼容 Provider 负责候选工具；RuleBasedProvider 离线兜底</a:t>
             </a:r>
             <a:endParaRPr lang="en-US" altLang="zh-CN" sz="2000">
               <a:solidFill>
@@ -18050,7 +18062,7 @@
                 </a:solidFill>
                 <a:latin typeface="微软雅黑" panose="020B0503020204020204" pitchFamily="34" charset="-122"/>
               </a:rPr>
-              <a:t>接入 DeepSeek</a:t>
+              <a:t>MCP 完成 initialize → initialized → tools/list/tools/call，发布 25 个工具</a:t>
             </a:r>
             <a:r>
               <a:rPr lang="en-US" sz="2000">
@@ -18059,7 +18071,7 @@
                 </a:solidFill>
                 <a:latin typeface="微软雅黑" panose="020B0503020204020204" pitchFamily="34" charset="-122"/>
               </a:rPr>
-              <a:t> </a:t>
+              <a:t/>
             </a:r>
             <a:r>
               <a:rPr sz="2000">
@@ -18068,7 +18080,7 @@
                 </a:solidFill>
                 <a:latin typeface="微软雅黑" panose="020B0503020204020204" pitchFamily="34" charset="-122"/>
               </a:rPr>
-              <a:t>/OpenAI 兼容大模型，dry-run + 审计 + 失败回退三道闸门</a:t>
+              <a:t/>
             </a:r>
             <a:endParaRPr lang="zh-CN" sz="2000">
               <a:solidFill>
@@ -18092,7 +18104,7 @@
                 </a:solidFill>
                 <a:latin typeface="微软雅黑" panose="020B0503020204020204" pitchFamily="34" charset="-122"/>
               </a:rPr>
-              <a:t>新增输出侧护栏，审计 LLM 追问/推理文本是否越权或触碰高危操作</a:t>
+              <a:t>真实 deepseek-chat 冒烟成功选择 system.info；网络失败自动回退</a:t>
             </a:r>
             <a:endParaRPr sz="2000">
               <a:solidFill>
@@ -18182,7 +18194,7 @@
                 </a:solidFill>
                 <a:latin typeface="方正小标宋简体" panose="03000509000000000000" charset="-122"/>
               </a:rPr>
-              <a:t>阶段四：确认令牌与 Web 工作台</a:t>
+              <a:t>Web 与状态安全</a:t>
             </a:r>
             <a:endParaRPr sz="2400" b="1">
               <a:solidFill>
@@ -18229,7 +18241,7 @@
                 </a:solidFill>
                 <a:latin typeface="微软雅黑" panose="020B0503020204020204" pitchFamily="34" charset="-122"/>
               </a:rPr>
-              <a:t>一次性确认令牌：预演与执行严格一致、限时、绑定会话</a:t>
+              <a:t>Bearer + HttpOnly/SameSite 会话、限流、SSE、CSP 与输入边界</a:t>
             </a:r>
             <a:endParaRPr lang="en-US" altLang="zh-CN" sz="2000">
               <a:solidFill>
@@ -18255,7 +18267,7 @@
                 </a:solidFill>
                 <a:latin typeface="微软雅黑" panose="020B0503020204020204" pitchFamily="34" charset="-122"/>
               </a:rPr>
-              <a:t>CLI + Web 双入口，Web 按会话隔离上下文、一键确认中风险</a:t>
+              <a:t>非回环监听强制 TLS 1.2 和认证；本机开发模式必须显式开启</a:t>
             </a:r>
             <a:endParaRPr sz="2000">
               <a:solidFill>
@@ -18279,7 +18291,7 @@
                 </a:solidFill>
                 <a:latin typeface="微软雅黑" panose="020B0503020204020204" pitchFamily="34" charset="-122"/>
               </a:rPr>
-              <a:t>受管工作区写前快照与真实回滚，服务生命周期真实执行 systemctl</a:t>
+              <a:t>待确认动作加密写盘，线程锁 + 跨进程锁 + 原子替换避免竞态</a:t>
             </a:r>
             <a:endParaRPr sz="2000">
               <a:solidFill>
@@ -18528,7 +18540,7 @@
                 <a:ea typeface="方正小标宋简体" panose="03000509000000000000" charset="-122"/>
                 <a:cs typeface="Times New Roman" panose="02020603050405020304" pitchFamily="18" charset="0"/>
               </a:rPr>
-              <a:t>项目进展时间线</a:t>
+              <a:t>项目背景与进展</a:t>
             </a:r>
             <a:endParaRPr lang="zh-CN" altLang="en-US" sz="2400" b="1" dirty="0">
               <a:solidFill>
@@ -18573,7 +18585,7 @@
                 <a:ea typeface="方正小标宋简体" panose="03000509000000000000" charset="-122"/>
                 <a:cs typeface="Times New Roman" panose="02020603050405020304" pitchFamily="18" charset="0"/>
               </a:rPr>
-              <a:t>技术思路</a:t>
+              <a:t>技术架构与安全</a:t>
             </a:r>
             <a:endParaRPr lang="zh-CN" altLang="en-US" sz="2400" b="1" dirty="0">
               <a:solidFill>
@@ -18618,7 +18630,7 @@
                 <a:ea typeface="方正小标宋简体" panose="03000509000000000000" charset="-122"/>
                 <a:cs typeface="Times New Roman" panose="02020603050405020304" pitchFamily="18" charset="0"/>
               </a:rPr>
-              <a:t>现有工作</a:t>
+              <a:t>功能成果与验证</a:t>
             </a:r>
             <a:endParaRPr lang="zh-CN" altLang="en-US" sz="2400" b="1" dirty="0">
               <a:solidFill>
@@ -18674,7 +18686,7 @@
                 <a:ea typeface="方正小标宋简体" panose="03000509000000000000" charset="-122"/>
                 <a:cs typeface="Times New Roman" panose="02020603050405020304" pitchFamily="18" charset="0"/>
               </a:rPr>
-              <a:t>后续展望与优化方向</a:t>
+              <a:t>演示、边界与展望</a:t>
             </a:r>
             <a:endParaRPr lang="zh-CN" altLang="en-US" sz="2400" b="1" dirty="0">
               <a:solidFill>
@@ -18780,7 +18792,7 @@
               <a:rPr sz="3600" b="1">
                 <a:latin typeface="微软雅黑" panose="020B0503020204020204" pitchFamily="34" charset="-122"/>
               </a:rPr>
-              <a:t>1.2 从规则闭环到安全护栏：总体研发过程</a:t>
+              <a:t>2.3 工程化、离线能力与发布</a:t>
             </a:r>
             <a:endParaRPr sz="3600" b="1">
               <a:latin typeface="微软雅黑" panose="020B0503020204020204" pitchFamily="34" charset="-122"/>
@@ -18817,7 +18829,7 @@
                 </a:solidFill>
                 <a:latin typeface="方正小标宋简体" panose="03000509000000000000" charset="-122"/>
               </a:rPr>
-              <a:t>工程质量保障</a:t>
+              <a:t>自动化质量</a:t>
             </a:r>
             <a:endParaRPr sz="2400" b="1">
               <a:solidFill>
@@ -18864,7 +18876,7 @@
                 </a:solidFill>
                 <a:latin typeface="微软雅黑" panose="020B0503020204020204" pitchFamily="34" charset="-122"/>
               </a:rPr>
-              <a:t>全程以“发现边界问题 → 固化为规则与单元测试”方式迭代</a:t>
+              <a:t>217 项 Python 测试与 7 项前端 Node 测试全部通过</a:t>
             </a:r>
             <a:endParaRPr lang="en-US" altLang="zh-CN" sz="2000" dirty="0">
               <a:solidFill>
@@ -18890,7 +18902,7 @@
                 </a:solidFill>
                 <a:latin typeface="微软雅黑" panose="020B0503020204020204" pitchFamily="34" charset="-122"/>
               </a:rPr>
-              <a:t>覆盖策略裁决、令牌闭环、哈希链审计、MCP 契约、护栏拦截等</a:t>
+              <a:t>综合覆盖率 72.3%，CI 门槛 70%，依赖和配置检查均通过</a:t>
             </a:r>
             <a:endParaRPr sz="2000">
               <a:solidFill>
@@ -18914,7 +18926,7 @@
                 </a:solidFill>
                 <a:latin typeface="微软雅黑" panose="020B0503020204020204" pitchFamily="34" charset="-122"/>
               </a:rPr>
-              <a:t>当前 130+ 个 unittest 全部离线确定性通过</a:t>
+              <a:t>覆盖策略、确认、并发、审计篡改、Web、MCP、安装资源与前端</a:t>
             </a:r>
             <a:endParaRPr sz="2000">
               <a:solidFill>
@@ -19004,7 +19016,7 @@
                 </a:solidFill>
                 <a:latin typeface="方正小标宋简体" panose="03000509000000000000" charset="-122"/>
               </a:rPr>
-              <a:t>性能与可复现</a:t>
+              <a:t>发布与可复现</a:t>
             </a:r>
             <a:endParaRPr sz="2400" b="1">
               <a:solidFill>
@@ -19046,7 +19058,7 @@
             </a:pPr>
             <a:r>
               <a:rPr sz="2000"/>
-              <a:t>大模型 8s 超时 + 失败自动回退规则，演示不中断</a:t>
+              <a:t>SAFEOPS_LLM_DISABLED=1 一键离线，规则路由覆盖核心运维意图</a:t>
             </a:r>
             <a:endParaRPr lang="en-US" altLang="zh-CN" sz="2000" dirty="0"/>
           </a:p>
@@ -19060,7 +19072,7 @@
             </a:pPr>
             <a:r>
               <a:rPr sz="2000"/>
-              <a:t>SAFEOPS_LLM_DISABLED 一键强制离线，测试零 API 费用</a:t>
+              <a:t>wheel 内置默认 YAML 和 Web 静态资源，可脱离源码目录运行</a:t>
             </a:r>
             <a:endParaRPr sz="2000"/>
           </a:p>
@@ -19074,7 +19086,7 @@
             </a:pPr>
             <a:r>
               <a:rPr sz="2000"/>
-              <a:t>核心运维链路本地可离线运行，LLM 仅为可选增强</a:t>
+              <a:t>95 条目提交包自动排除 API Key、data/、缓存和 Git 元数据</a:t>
             </a:r>
             <a:endParaRPr sz="2000"/>
           </a:p>
@@ -19329,7 +19341,7 @@
               <a:rPr sz="3600" b="1">
                 <a:latin typeface="微软雅黑" panose="020B0503020204020204" pitchFamily="34" charset="-122"/>
               </a:rPr>
-              <a:t>2.1 整体架构设计</a:t>
+              <a:t>3.1 整体架构设计</a:t>
             </a:r>
             <a:endParaRPr sz="3600" b="1">
               <a:latin typeface="微软雅黑" panose="020B0503020204020204" pitchFamily="34" charset="-122"/>
@@ -19369,7 +19381,7 @@
                 <a:ea typeface="方正小标宋简体" panose="03000509000000000000" charset="-122"/>
                 <a:cs typeface="Times New Roman" panose="02020603050405020304" pitchFamily="18" charset="0"/>
               </a:rPr>
-              <a:t>项目进展时间线</a:t>
+              <a:t>项目背景与进展</a:t>
             </a:r>
             <a:endParaRPr lang="zh-CN" altLang="en-US" sz="2400" b="1" dirty="0">
               <a:solidFill>
@@ -19414,7 +19426,7 @@
                 <a:ea typeface="方正小标宋简体" panose="03000509000000000000" charset="-122"/>
                 <a:cs typeface="Times New Roman" panose="02020603050405020304" pitchFamily="18" charset="0"/>
               </a:rPr>
-              <a:t>技术思路</a:t>
+              <a:t>技术架构与安全</a:t>
             </a:r>
             <a:endParaRPr lang="zh-CN" altLang="en-US" sz="2400" b="1" dirty="0">
               <a:solidFill>
@@ -19459,7 +19471,7 @@
                 <a:ea typeface="方正小标宋简体" panose="03000509000000000000" charset="-122"/>
                 <a:cs typeface="Times New Roman" panose="02020603050405020304" pitchFamily="18" charset="0"/>
               </a:rPr>
-              <a:t>现有工作</a:t>
+              <a:t>功能成果与验证</a:t>
             </a:r>
             <a:endParaRPr lang="zh-CN" altLang="en-US" sz="2400" b="1" dirty="0">
               <a:solidFill>
@@ -19515,7 +19527,7 @@
                 <a:ea typeface="方正小标宋简体" panose="03000509000000000000" charset="-122"/>
                 <a:cs typeface="Times New Roman" panose="02020603050405020304" pitchFamily="18" charset="0"/>
               </a:rPr>
-              <a:t>后续展望与优化方向</a:t>
+              <a:t>演示、边界与展望</a:t>
             </a:r>
             <a:endParaRPr lang="zh-CN" altLang="en-US" sz="2400" b="1" dirty="0">
               <a:solidFill>
